--- a/public/fun/cards/creative/creative-47.pptx
+++ b/public/fun/cards/creative/creative-47.pptx
@@ -3085,7 +3085,7 @@
     <p:bg>
       <p:bgPr>
         <a:solidFill>
-          <a:srgbClr val="A17F12"/>
+          <a:srgbClr val="FF6A13"/>
         </a:solidFill>
         <a:effectLst/>
       </p:bgPr>
@@ -3099,341 +3099,14 @@
       <p:grpSpPr/>
       <p:sp>
         <p:nvSpPr>
-          <p:cNvPr id="2" name="Rectangle 1"/>
+          <p:cNvPr id="2" name="Freeform 1"/>
           <p:cNvSpPr/>
           <p:nvPr/>
         </p:nvSpPr>
         <p:spPr>
           <a:xfrm>
-            <a:off x="93600" y="93600"/>
-            <a:ext cx="3052800" cy="1612800"/>
-          </a:xfrm>
-          <a:prstGeom prst="rect">
-            <a:avLst/>
-          </a:prstGeom>
-          <a:noFill/>
-          <a:ln w="10800">
-            <a:solidFill>
-              <a:srgbClr val="FAEEC6"/>
-            </a:solidFill>
-          </a:ln>
-        </p:spPr>
-        <p:txBody>
-          <a:bodyPr rtlCol="0" anchor="ctr"/>
-          <a:lstStyle/>
-          <a:p>
-            <a:pPr algn="ctr"/>
-          </a:p>
-        </p:txBody>
-      </p:sp>
-      <p:sp>
-        <p:nvSpPr>
-          <p:cNvPr id="3" name="Rectangle 2"/>
-          <p:cNvSpPr/>
-          <p:nvPr/>
-        </p:nvSpPr>
-        <p:spPr>
-          <a:xfrm>
-            <a:off x="144000" y="144000"/>
-            <a:ext cx="2952000" cy="1512000"/>
-          </a:xfrm>
-          <a:prstGeom prst="rect">
-            <a:avLst/>
-          </a:prstGeom>
-          <a:noFill/>
-          <a:ln w="5400">
-            <a:solidFill>
-              <a:srgbClr val="B09338"/>
-            </a:solidFill>
-          </a:ln>
-        </p:spPr>
-        <p:txBody>
-          <a:bodyPr rtlCol="0" anchor="ctr"/>
-          <a:lstStyle/>
-          <a:p>
-            <a:pPr algn="ctr"/>
-          </a:p>
-        </p:txBody>
-      </p:sp>
-      <p:sp>
-        <p:nvSpPr>
-          <p:cNvPr id="4" name="텍스트"/>
-          <p:cNvSpPr txBox="1"/>
-          <p:nvPr/>
-        </p:nvSpPr>
-        <p:spPr>
-          <a:xfrm>
-            <a:off x="360000" y="280800"/>
-            <a:ext cx="2520000" cy="100800"/>
-          </a:xfrm>
-          <a:prstGeom prst="rect">
-            <a:avLst/>
-          </a:prstGeom>
-          <a:noFill/>
-        </p:spPr>
-        <p:txBody>
-          <a:bodyPr wrap="square" lIns="0" rIns="0" tIns="0" bIns="0" anchor="t">
-            <a:spAutoFit/>
-          </a:bodyPr>
-          <a:lstStyle/>
-          <a:p>
-            <a:pPr algn="ctr">
-              <a:lnSpc>
-                <a:spcPts val="1015"/>
-              </a:lnSpc>
-            </a:pPr>
-            <a:r>
-              <a:rPr sz="700" b="1" spc="400">
-                <a:solidFill>
-                  <a:srgbClr val="FFFFFF"/>
-                </a:solidFill>
-                <a:latin typeface="맑은 고딕"/>
-                <a:ea typeface="맑은 고딕"/>
-              </a:rPr>
-              <a:t>스튜디오 이름</a:t>
-            </a:r>
-          </a:p>
-        </p:txBody>
-      </p:sp>
-      <p:sp>
-        <p:nvSpPr>
-          <p:cNvPr id="5" name="텍스트"/>
-          <p:cNvSpPr txBox="1"/>
-          <p:nvPr/>
-        </p:nvSpPr>
-        <p:spPr>
-          <a:xfrm>
-            <a:off x="360000" y="468000"/>
-            <a:ext cx="2520000" cy="313692"/>
-          </a:xfrm>
-          <a:prstGeom prst="rect">
-            <a:avLst/>
-          </a:prstGeom>
-          <a:noFill/>
-        </p:spPr>
-        <p:txBody>
-          <a:bodyPr wrap="square" lIns="0" rIns="0" tIns="0" bIns="0" anchor="t">
-            <a:spAutoFit/>
-          </a:bodyPr>
-          <a:lstStyle/>
-          <a:p>
-            <a:pPr algn="ctr">
-              <a:lnSpc>
-                <a:spcPts val="2755"/>
-              </a:lnSpc>
-            </a:pPr>
-            <a:r>
-              <a:rPr sz="1900" b="1" spc="50">
-                <a:solidFill>
-                  <a:srgbClr val="FFFFFF"/>
-                </a:solidFill>
-                <a:latin typeface="맑은 고딕"/>
-                <a:ea typeface="맑은 고딕"/>
-              </a:rPr>
-              <a:t>범채원</a:t>
-            </a:r>
-          </a:p>
-        </p:txBody>
-      </p:sp>
-      <p:sp>
-        <p:nvSpPr>
-          <p:cNvPr id="6" name="텍스트"/>
-          <p:cNvSpPr txBox="1"/>
-          <p:nvPr/>
-        </p:nvSpPr>
-        <p:spPr>
-          <a:xfrm>
-            <a:off x="360000" y="784800"/>
-            <a:ext cx="2520000" cy="122400"/>
-          </a:xfrm>
-          <a:prstGeom prst="rect">
-            <a:avLst/>
-          </a:prstGeom>
-          <a:noFill/>
-        </p:spPr>
-        <p:txBody>
-          <a:bodyPr wrap="square" lIns="0" rIns="0" tIns="0" bIns="0" anchor="t">
-            <a:spAutoFit/>
-          </a:bodyPr>
-          <a:lstStyle/>
-          <a:p>
-            <a:pPr algn="ctr">
-              <a:lnSpc>
-                <a:spcPts val="1232"/>
-              </a:lnSpc>
-            </a:pPr>
-            <a:r>
-              <a:rPr sz="850" b="1">
-                <a:solidFill>
-                  <a:srgbClr val="FFFFFF"/>
-                </a:solidFill>
-                <a:latin typeface="맑은 고딕"/>
-                <a:ea typeface="맑은 고딕"/>
-              </a:rPr>
-              <a:t>포토그래퍼</a:t>
-            </a:r>
-          </a:p>
-        </p:txBody>
-      </p:sp>
-      <p:sp>
-        <p:nvSpPr>
-          <p:cNvPr id="7" name="Rectangle 6"/>
-          <p:cNvSpPr/>
-          <p:nvPr/>
-        </p:nvSpPr>
-        <p:spPr>
-          <a:xfrm>
-            <a:off x="1530000" y="993600"/>
-            <a:ext cx="180000" cy="10800"/>
-          </a:xfrm>
-          <a:prstGeom prst="rect">
-            <a:avLst/>
-          </a:prstGeom>
-          <a:solidFill>
-            <a:srgbClr val="FAEEC6"/>
-          </a:solidFill>
-          <a:ln>
-            <a:noFill/>
-          </a:ln>
-        </p:spPr>
-        <p:txBody>
-          <a:bodyPr rtlCol="0" anchor="ctr"/>
-          <a:lstStyle/>
-          <a:p>
-            <a:pPr algn="ctr"/>
-          </a:p>
-        </p:txBody>
-      </p:sp>
-      <p:sp>
-        <p:nvSpPr>
-          <p:cNvPr id="8" name="텍스트"/>
-          <p:cNvSpPr txBox="1"/>
-          <p:nvPr/>
-        </p:nvSpPr>
-        <p:spPr>
-          <a:xfrm>
-            <a:off x="360000" y="1087200"/>
-            <a:ext cx="2520000" cy="108000"/>
-          </a:xfrm>
-          <a:prstGeom prst="rect">
-            <a:avLst/>
-          </a:prstGeom>
-          <a:noFill/>
-        </p:spPr>
-        <p:txBody>
-          <a:bodyPr wrap="square" lIns="0" rIns="0" tIns="0" bIns="0" anchor="t">
-            <a:spAutoFit/>
-          </a:bodyPr>
-          <a:lstStyle/>
-          <a:p>
-            <a:pPr algn="ctr">
-              <a:lnSpc>
-                <a:spcPts val="1087"/>
-              </a:lnSpc>
-            </a:pPr>
-            <a:r>
-              <a:rPr sz="750" b="0">
-                <a:solidFill>
-                  <a:srgbClr val="FFFFFF"/>
-                </a:solidFill>
-                <a:latin typeface="맑은 고딕"/>
-                <a:ea typeface="맑은 고딕"/>
-              </a:rPr>
-              <a:t>010-1234-5678</a:t>
-            </a:r>
-          </a:p>
-        </p:txBody>
-      </p:sp>
-      <p:sp>
-        <p:nvSpPr>
-          <p:cNvPr id="9" name="텍스트"/>
-          <p:cNvSpPr txBox="1"/>
-          <p:nvPr/>
-        </p:nvSpPr>
-        <p:spPr>
-          <a:xfrm>
-            <a:off x="360000" y="1209600"/>
-            <a:ext cx="2520000" cy="108000"/>
-          </a:xfrm>
-          <a:prstGeom prst="rect">
-            <a:avLst/>
-          </a:prstGeom>
-          <a:noFill/>
-        </p:spPr>
-        <p:txBody>
-          <a:bodyPr wrap="square" lIns="0" rIns="0" tIns="0" bIns="0" anchor="t">
-            <a:spAutoFit/>
-          </a:bodyPr>
-          <a:lstStyle/>
-          <a:p>
-            <a:pPr algn="ctr">
-              <a:lnSpc>
-                <a:spcPts val="1087"/>
-              </a:lnSpc>
-            </a:pPr>
-            <a:r>
-              <a:rPr sz="750" b="0">
-                <a:solidFill>
-                  <a:srgbClr val="FFFFFF"/>
-                </a:solidFill>
-                <a:latin typeface="맑은 고딕"/>
-                <a:ea typeface="맑은 고딕"/>
-              </a:rPr>
-              <a:t>name@example.com</a:t>
-            </a:r>
-          </a:p>
-        </p:txBody>
-      </p:sp>
-      <p:sp>
-        <p:nvSpPr>
-          <p:cNvPr id="10" name="텍스트"/>
-          <p:cNvSpPr txBox="1"/>
-          <p:nvPr/>
-        </p:nvSpPr>
-        <p:spPr>
-          <a:xfrm>
-            <a:off x="360000" y="1332000"/>
-            <a:ext cx="2520000" cy="108000"/>
-          </a:xfrm>
-          <a:prstGeom prst="rect">
-            <a:avLst/>
-          </a:prstGeom>
-          <a:noFill/>
-        </p:spPr>
-        <p:txBody>
-          <a:bodyPr wrap="square" lIns="0" rIns="0" tIns="0" bIns="0" anchor="t">
-            <a:spAutoFit/>
-          </a:bodyPr>
-          <a:lstStyle/>
-          <a:p>
-            <a:pPr algn="ctr">
-              <a:lnSpc>
-                <a:spcPts val="1015"/>
-              </a:lnSpc>
-            </a:pPr>
-            <a:r>
-              <a:rPr sz="700" b="0">
-                <a:solidFill>
-                  <a:srgbClr val="FFFFFF"/>
-                </a:solidFill>
-                <a:latin typeface="맑은 고딕"/>
-                <a:ea typeface="맑은 고딕"/>
-              </a:rPr>
-              <a:t>주소를 입력해 주세요</a:t>
-            </a:r>
-          </a:p>
-        </p:txBody>
-      </p:sp>
-      <p:sp>
-        <p:nvSpPr>
-          <p:cNvPr id="11" name="Freeform 10"/>
-          <p:cNvSpPr/>
-          <p:nvPr/>
-        </p:nvSpPr>
-        <p:spPr>
-          <a:xfrm>
-            <a:off x="1590175" y="1497289"/>
-            <a:ext cx="75478" cy="82559"/>
+            <a:off x="2016000" y="0"/>
+            <a:ext cx="1224000" cy="1800000"/>
           </a:xfrm>
           <a:custGeom>
             <a:avLst/>
@@ -3442,25 +3115,25 @@
             <a:cxnLst/>
             <a:rect l="l" t="t" r="r" b="b"/>
             <a:pathLst>
-              <a:path w="75478" h="82559">
+              <a:path w="1224000" h="1800000">
                 <a:moveTo>
-                  <a:pt x="54519" y="0"/>
+                  <a:pt x="360000" y="0"/>
                 </a:moveTo>
                 <a:lnTo>
-                  <a:pt x="75478" y="17586"/>
+                  <a:pt x="1224000" y="0"/>
                 </a:lnTo>
                 <a:lnTo>
-                  <a:pt x="20959" y="82559"/>
+                  <a:pt x="1224000" y="1800000"/>
                 </a:lnTo>
                 <a:lnTo>
-                  <a:pt x="0" y="64973"/>
+                  <a:pt x="0" y="1800000"/>
                 </a:lnTo>
                 <a:close/>
               </a:path>
             </a:pathLst>
           </a:custGeom>
           <a:solidFill>
-            <a:srgbClr val="FAEEC6"/>
+            <a:srgbClr val="12151C"/>
           </a:solidFill>
           <a:ln>
             <a:noFill/>
@@ -3476,14 +3149,14 @@
       </p:sp>
       <p:sp>
         <p:nvSpPr>
-          <p:cNvPr id="12" name="Freeform 11"/>
+          <p:cNvPr id="3" name="Freeform 2"/>
           <p:cNvSpPr/>
           <p:nvPr/>
         </p:nvSpPr>
         <p:spPr>
           <a:xfrm>
-            <a:off x="1581309" y="1562262"/>
-            <a:ext cx="29825" cy="31848"/>
+            <a:off x="1864800" y="0"/>
+            <a:ext cx="460800" cy="1800000"/>
           </a:xfrm>
           <a:custGeom>
             <a:avLst/>
@@ -3492,22 +3165,25 @@
             <a:cxnLst/>
             <a:rect l="l" t="t" r="r" b="b"/>
             <a:pathLst>
-              <a:path w="29825" h="31848">
+              <a:path w="460800" h="1800000">
                 <a:moveTo>
-                  <a:pt x="8866" y="0"/>
+                  <a:pt x="360000" y="0"/>
                 </a:moveTo>
                 <a:lnTo>
-                  <a:pt x="29825" y="17586"/>
+                  <a:pt x="460800" y="0"/>
                 </a:lnTo>
                 <a:lnTo>
-                  <a:pt x="0" y="31848"/>
+                  <a:pt x="100800" y="1800000"/>
+                </a:lnTo>
+                <a:lnTo>
+                  <a:pt x="0" y="1800000"/>
                 </a:lnTo>
                 <a:close/>
               </a:path>
             </a:pathLst>
           </a:custGeom>
           <a:solidFill>
-            <a:srgbClr val="B09338"/>
+            <a:srgbClr val="FF8842"/>
           </a:solidFill>
           <a:ln>
             <a:noFill/>
@@ -3523,41 +3199,140 @@
       </p:sp>
       <p:sp>
         <p:nvSpPr>
-          <p:cNvPr id="13" name="Freeform 12"/>
+          <p:cNvPr id="4" name="텍스트"/>
+          <p:cNvSpPr txBox="1"/>
+          <p:nvPr/>
+        </p:nvSpPr>
+        <p:spPr>
+          <a:xfrm>
+            <a:off x="252000" y="223200"/>
+            <a:ext cx="1440000" cy="133351"/>
+          </a:xfrm>
+          <a:prstGeom prst="rect">
+            <a:avLst/>
+          </a:prstGeom>
+          <a:noFill/>
+        </p:spPr>
+        <p:txBody>
+          <a:bodyPr wrap="square" lIns="0" rIns="0" tIns="0" bIns="0" anchor="t">
+            <a:spAutoFit/>
+          </a:bodyPr>
+          <a:lstStyle/>
+          <a:p>
+            <a:pPr algn="l">
+              <a:lnSpc>
+                <a:spcPts val="1015"/>
+              </a:lnSpc>
+            </a:pPr>
+            <a:r>
+              <a:rPr sz="700" b="1" spc="200">
+                <a:solidFill>
+                  <a:srgbClr val="46281A"/>
+                </a:solidFill>
+                <a:latin typeface="맑은 고딕"/>
+                <a:ea typeface="맑은 고딕"/>
+              </a:rPr>
+              <a:t>스튜디오 이름</a:t>
+            </a:r>
+          </a:p>
+        </p:txBody>
+      </p:sp>
+      <p:sp>
+        <p:nvSpPr>
+          <p:cNvPr id="5" name="텍스트"/>
+          <p:cNvSpPr txBox="1"/>
+          <p:nvPr/>
+        </p:nvSpPr>
+        <p:spPr>
+          <a:xfrm>
+            <a:off x="252000" y="540000"/>
+            <a:ext cx="1584000" cy="360000"/>
+          </a:xfrm>
+          <a:prstGeom prst="rect">
+            <a:avLst/>
+          </a:prstGeom>
+          <a:noFill/>
+        </p:spPr>
+        <p:txBody>
+          <a:bodyPr wrap="square" lIns="0" rIns="0" tIns="0" bIns="0" anchor="t">
+            <a:spAutoFit/>
+          </a:bodyPr>
+          <a:lstStyle/>
+          <a:p>
+            <a:pPr algn="l">
+              <a:lnSpc>
+                <a:spcPts val="3190"/>
+              </a:lnSpc>
+            </a:pPr>
+            <a:r>
+              <a:rPr sz="2200" b="1">
+                <a:solidFill>
+                  <a:srgbClr val="12151C"/>
+                </a:solidFill>
+                <a:latin typeface="맑은 고딕"/>
+                <a:ea typeface="맑은 고딕"/>
+              </a:rPr>
+              <a:t>범채원</a:t>
+            </a:r>
+          </a:p>
+        </p:txBody>
+      </p:sp>
+      <p:sp>
+        <p:nvSpPr>
+          <p:cNvPr id="6" name="텍스트"/>
+          <p:cNvSpPr txBox="1"/>
+          <p:nvPr/>
+        </p:nvSpPr>
+        <p:spPr>
+          <a:xfrm>
+            <a:off x="252000" y="943200"/>
+            <a:ext cx="1584000" cy="171451"/>
+          </a:xfrm>
+          <a:prstGeom prst="rect">
+            <a:avLst/>
+          </a:prstGeom>
+          <a:noFill/>
+        </p:spPr>
+        <p:txBody>
+          <a:bodyPr wrap="square" lIns="0" rIns="0" tIns="0" bIns="0" anchor="t">
+            <a:spAutoFit/>
+          </a:bodyPr>
+          <a:lstStyle/>
+          <a:p>
+            <a:pPr algn="l">
+              <a:lnSpc>
+                <a:spcPts val="1305"/>
+              </a:lnSpc>
+            </a:pPr>
+            <a:r>
+              <a:rPr sz="900" b="0">
+                <a:solidFill>
+                  <a:srgbClr val="46281A"/>
+                </a:solidFill>
+                <a:latin typeface="맑은 고딕"/>
+                <a:ea typeface="맑은 고딕"/>
+              </a:rPr>
+              <a:t>포토그래퍼</a:t>
+            </a:r>
+          </a:p>
+        </p:txBody>
+      </p:sp>
+      <p:sp>
+        <p:nvSpPr>
+          <p:cNvPr id="7" name="Rectangle 6"/>
           <p:cNvSpPr/>
           <p:nvPr/>
         </p:nvSpPr>
         <p:spPr>
           <a:xfrm>
-            <a:off x="1644694" y="1486809"/>
-            <a:ext cx="29752" cy="28066"/>
+            <a:off x="252000" y="1195200"/>
+            <a:ext cx="144000" cy="18000"/>
           </a:xfrm>
-          <a:custGeom>
+          <a:prstGeom prst="rect">
             <a:avLst/>
-            <a:gdLst/>
-            <a:ahLst/>
-            <a:cxnLst/>
-            <a:rect l="l" t="t" r="r" b="b"/>
-            <a:pathLst>
-              <a:path w="29752" h="28066">
-                <a:moveTo>
-                  <a:pt x="8793" y="0"/>
-                </a:moveTo>
-                <a:lnTo>
-                  <a:pt x="29752" y="17587"/>
-                </a:lnTo>
-                <a:lnTo>
-                  <a:pt x="20959" y="28066"/>
-                </a:lnTo>
-                <a:lnTo>
-                  <a:pt x="0" y="10480"/>
-                </a:lnTo>
-                <a:close/>
-              </a:path>
-            </a:pathLst>
-          </a:custGeom>
+          </a:prstGeom>
           <a:solidFill>
-            <a:srgbClr val="B09338"/>
+            <a:srgbClr val="12151C"/>
           </a:solidFill>
           <a:ln>
             <a:noFill/>
@@ -3568,6 +3343,246 @@
           <a:lstStyle/>
           <a:p>
             <a:pPr algn="ctr"/>
+          </a:p>
+        </p:txBody>
+      </p:sp>
+      <p:sp>
+        <p:nvSpPr>
+          <p:cNvPr id="8" name="텍스트"/>
+          <p:cNvSpPr txBox="1"/>
+          <p:nvPr/>
+        </p:nvSpPr>
+        <p:spPr>
+          <a:xfrm>
+            <a:off x="252000" y="1328400"/>
+            <a:ext cx="331200" cy="99061"/>
+          </a:xfrm>
+          <a:prstGeom prst="rect">
+            <a:avLst/>
+          </a:prstGeom>
+          <a:noFill/>
+        </p:spPr>
+        <p:txBody>
+          <a:bodyPr wrap="square" lIns="0" rIns="0" tIns="0" bIns="0" anchor="t">
+            <a:spAutoFit/>
+          </a:bodyPr>
+          <a:lstStyle/>
+          <a:p>
+            <a:pPr algn="l">
+              <a:lnSpc>
+                <a:spcPts val="754"/>
+              </a:lnSpc>
+            </a:pPr>
+            <a:r>
+              <a:rPr sz="520" b="1" spc="120">
+                <a:solidFill>
+                  <a:srgbClr val="46281A"/>
+                </a:solidFill>
+                <a:latin typeface="맑은 고딕"/>
+                <a:ea typeface="맑은 고딕"/>
+              </a:rPr>
+              <a:t>TEL</a:t>
+            </a:r>
+          </a:p>
+        </p:txBody>
+      </p:sp>
+      <p:sp>
+        <p:nvSpPr>
+          <p:cNvPr id="9" name="텍스트"/>
+          <p:cNvSpPr txBox="1"/>
+          <p:nvPr/>
+        </p:nvSpPr>
+        <p:spPr>
+          <a:xfrm>
+            <a:off x="583200" y="1317600"/>
+            <a:ext cx="1188000" cy="125731"/>
+          </a:xfrm>
+          <a:prstGeom prst="rect">
+            <a:avLst/>
+          </a:prstGeom>
+          <a:noFill/>
+        </p:spPr>
+        <p:txBody>
+          <a:bodyPr wrap="square" lIns="0" rIns="0" tIns="0" bIns="0" anchor="t">
+            <a:spAutoFit/>
+          </a:bodyPr>
+          <a:lstStyle/>
+          <a:p>
+            <a:pPr algn="l">
+              <a:lnSpc>
+                <a:spcPts val="956"/>
+              </a:lnSpc>
+            </a:pPr>
+            <a:r>
+              <a:rPr sz="660" b="0">
+                <a:solidFill>
+                  <a:srgbClr val="12151C"/>
+                </a:solidFill>
+                <a:latin typeface="맑은 고딕"/>
+                <a:ea typeface="맑은 고딕"/>
+              </a:rPr>
+              <a:t>010-1234-5678</a:t>
+            </a:r>
+          </a:p>
+        </p:txBody>
+      </p:sp>
+      <p:sp>
+        <p:nvSpPr>
+          <p:cNvPr id="10" name="텍스트"/>
+          <p:cNvSpPr txBox="1"/>
+          <p:nvPr/>
+        </p:nvSpPr>
+        <p:spPr>
+          <a:xfrm>
+            <a:off x="252000" y="1458000"/>
+            <a:ext cx="331200" cy="99061"/>
+          </a:xfrm>
+          <a:prstGeom prst="rect">
+            <a:avLst/>
+          </a:prstGeom>
+          <a:noFill/>
+        </p:spPr>
+        <p:txBody>
+          <a:bodyPr wrap="square" lIns="0" rIns="0" tIns="0" bIns="0" anchor="t">
+            <a:spAutoFit/>
+          </a:bodyPr>
+          <a:lstStyle/>
+          <a:p>
+            <a:pPr algn="l">
+              <a:lnSpc>
+                <a:spcPts val="754"/>
+              </a:lnSpc>
+            </a:pPr>
+            <a:r>
+              <a:rPr sz="520" b="1" spc="120">
+                <a:solidFill>
+                  <a:srgbClr val="46281A"/>
+                </a:solidFill>
+                <a:latin typeface="맑은 고딕"/>
+                <a:ea typeface="맑은 고딕"/>
+              </a:rPr>
+              <a:t>MAIL</a:t>
+            </a:r>
+          </a:p>
+        </p:txBody>
+      </p:sp>
+      <p:sp>
+        <p:nvSpPr>
+          <p:cNvPr id="11" name="텍스트"/>
+          <p:cNvSpPr txBox="1"/>
+          <p:nvPr/>
+        </p:nvSpPr>
+        <p:spPr>
+          <a:xfrm>
+            <a:off x="583200" y="1447200"/>
+            <a:ext cx="1188000" cy="125731"/>
+          </a:xfrm>
+          <a:prstGeom prst="rect">
+            <a:avLst/>
+          </a:prstGeom>
+          <a:noFill/>
+        </p:spPr>
+        <p:txBody>
+          <a:bodyPr wrap="square" lIns="0" rIns="0" tIns="0" bIns="0" anchor="t">
+            <a:spAutoFit/>
+          </a:bodyPr>
+          <a:lstStyle/>
+          <a:p>
+            <a:pPr algn="l">
+              <a:lnSpc>
+                <a:spcPts val="956"/>
+              </a:lnSpc>
+            </a:pPr>
+            <a:r>
+              <a:rPr sz="660" b="0">
+                <a:solidFill>
+                  <a:srgbClr val="12151C"/>
+                </a:solidFill>
+                <a:latin typeface="맑은 고딕"/>
+                <a:ea typeface="맑은 고딕"/>
+              </a:rPr>
+              <a:t>name@example.com</a:t>
+            </a:r>
+          </a:p>
+        </p:txBody>
+      </p:sp>
+      <p:sp>
+        <p:nvSpPr>
+          <p:cNvPr id="12" name="텍스트"/>
+          <p:cNvSpPr txBox="1"/>
+          <p:nvPr/>
+        </p:nvSpPr>
+        <p:spPr>
+          <a:xfrm>
+            <a:off x="252000" y="1587600"/>
+            <a:ext cx="331200" cy="99061"/>
+          </a:xfrm>
+          <a:prstGeom prst="rect">
+            <a:avLst/>
+          </a:prstGeom>
+          <a:noFill/>
+        </p:spPr>
+        <p:txBody>
+          <a:bodyPr wrap="square" lIns="0" rIns="0" tIns="0" bIns="0" anchor="t">
+            <a:spAutoFit/>
+          </a:bodyPr>
+          <a:lstStyle/>
+          <a:p>
+            <a:pPr algn="l">
+              <a:lnSpc>
+                <a:spcPts val="754"/>
+              </a:lnSpc>
+            </a:pPr>
+            <a:r>
+              <a:rPr sz="520" b="1" spc="120">
+                <a:solidFill>
+                  <a:srgbClr val="46281A"/>
+                </a:solidFill>
+                <a:latin typeface="맑은 고딕"/>
+                <a:ea typeface="맑은 고딕"/>
+              </a:rPr>
+              <a:t>ADDR</a:t>
+            </a:r>
+          </a:p>
+        </p:txBody>
+      </p:sp>
+      <p:sp>
+        <p:nvSpPr>
+          <p:cNvPr id="13" name="텍스트"/>
+          <p:cNvSpPr txBox="1"/>
+          <p:nvPr/>
+        </p:nvSpPr>
+        <p:spPr>
+          <a:xfrm>
+            <a:off x="583200" y="1576800"/>
+            <a:ext cx="1188000" cy="125731"/>
+          </a:xfrm>
+          <a:prstGeom prst="rect">
+            <a:avLst/>
+          </a:prstGeom>
+          <a:noFill/>
+        </p:spPr>
+        <p:txBody>
+          <a:bodyPr wrap="square" lIns="0" rIns="0" tIns="0" bIns="0" anchor="t">
+            <a:spAutoFit/>
+          </a:bodyPr>
+          <a:lstStyle/>
+          <a:p>
+            <a:pPr algn="l">
+              <a:lnSpc>
+                <a:spcPts val="956"/>
+              </a:lnSpc>
+            </a:pPr>
+            <a:r>
+              <a:rPr sz="660" b="0">
+                <a:solidFill>
+                  <a:srgbClr val="12151C"/>
+                </a:solidFill>
+                <a:latin typeface="맑은 고딕"/>
+                <a:ea typeface="맑은 고딕"/>
+              </a:rPr>
+              <a:t>주소를 입력해 주세요</a:t>
+            </a:r>
           </a:p>
         </p:txBody>
       </p:sp>
@@ -3585,7 +3600,7 @@
     <p:bg>
       <p:bgPr>
         <a:solidFill>
-          <a:srgbClr val="FDF9ED"/>
+          <a:srgbClr val="F3F4F6"/>
         </a:solidFill>
         <a:effectLst/>
       </p:bgPr>
@@ -3599,190 +3614,14 @@
       <p:grpSpPr/>
       <p:sp>
         <p:nvSpPr>
-          <p:cNvPr id="2" name="Rectangle 1"/>
-          <p:cNvSpPr/>
+          <p:cNvPr id="2" name="텍스트"/>
+          <p:cNvSpPr txBox="1"/>
           <p:nvPr/>
         </p:nvSpPr>
         <p:spPr>
           <a:xfrm>
-            <a:off x="0" y="0"/>
-            <a:ext cx="1224000" cy="1800000"/>
-          </a:xfrm>
-          <a:prstGeom prst="rect">
-            <a:avLst/>
-          </a:prstGeom>
-          <a:solidFill>
-            <a:srgbClr val="CAA016"/>
-          </a:solidFill>
-          <a:ln>
-            <a:noFill/>
-          </a:ln>
-        </p:spPr>
-        <p:txBody>
-          <a:bodyPr rtlCol="0" anchor="ctr"/>
-          <a:lstStyle/>
-          <a:p>
-            <a:pPr algn="ctr"/>
-          </a:p>
-        </p:txBody>
-      </p:sp>
-      <p:sp>
-        <p:nvSpPr>
-          <p:cNvPr id="3" name="Freeform 2"/>
-          <p:cNvSpPr/>
-          <p:nvPr/>
-        </p:nvSpPr>
-        <p:spPr>
-          <a:xfrm>
-            <a:off x="494270" y="699824"/>
-            <a:ext cx="297939" cy="325893"/>
-          </a:xfrm>
-          <a:custGeom>
-            <a:avLst/>
-            <a:gdLst/>
-            <a:ahLst/>
-            <a:cxnLst/>
-            <a:rect l="l" t="t" r="r" b="b"/>
-            <a:pathLst>
-              <a:path w="297939" h="325893">
-                <a:moveTo>
-                  <a:pt x="215206" y="0"/>
-                </a:moveTo>
-                <a:lnTo>
-                  <a:pt x="297939" y="69421"/>
-                </a:lnTo>
-                <a:lnTo>
-                  <a:pt x="82733" y="325893"/>
-                </a:lnTo>
-                <a:lnTo>
-                  <a:pt x="0" y="256472"/>
-                </a:lnTo>
-                <a:close/>
-              </a:path>
-            </a:pathLst>
-          </a:custGeom>
-          <a:solidFill>
-            <a:srgbClr val="FFFFFF"/>
-          </a:solidFill>
-          <a:ln>
-            <a:noFill/>
-          </a:ln>
-        </p:spPr>
-        <p:txBody>
-          <a:bodyPr rtlCol="0" anchor="ctr"/>
-          <a:lstStyle/>
-          <a:p>
-            <a:pPr algn="ctr"/>
-          </a:p>
-        </p:txBody>
-      </p:sp>
-      <p:sp>
-        <p:nvSpPr>
-          <p:cNvPr id="4" name="Freeform 3"/>
-          <p:cNvSpPr/>
-          <p:nvPr/>
-        </p:nvSpPr>
-        <p:spPr>
-          <a:xfrm>
-            <a:off x="459274" y="956296"/>
-            <a:ext cx="117729" cy="125716"/>
-          </a:xfrm>
-          <a:custGeom>
-            <a:avLst/>
-            <a:gdLst/>
-            <a:ahLst/>
-            <a:cxnLst/>
-            <a:rect l="l" t="t" r="r" b="b"/>
-            <a:pathLst>
-              <a:path w="117729" h="125716">
-                <a:moveTo>
-                  <a:pt x="34996" y="0"/>
-                </a:moveTo>
-                <a:lnTo>
-                  <a:pt x="117729" y="69421"/>
-                </a:lnTo>
-                <a:lnTo>
-                  <a:pt x="0" y="125716"/>
-                </a:lnTo>
-                <a:close/>
-              </a:path>
-            </a:pathLst>
-          </a:custGeom>
-          <a:solidFill>
-            <a:srgbClr val="8C8C8C"/>
-          </a:solidFill>
-          <a:ln>
-            <a:noFill/>
-          </a:ln>
-        </p:spPr>
-        <p:txBody>
-          <a:bodyPr rtlCol="0" anchor="ctr"/>
-          <a:lstStyle/>
-          <a:p>
-            <a:pPr algn="ctr"/>
-          </a:p>
-        </p:txBody>
-      </p:sp>
-      <p:sp>
-        <p:nvSpPr>
-          <p:cNvPr id="5" name="Freeform 4"/>
-          <p:cNvSpPr/>
-          <p:nvPr/>
-        </p:nvSpPr>
-        <p:spPr>
-          <a:xfrm>
-            <a:off x="709476" y="658457"/>
-            <a:ext cx="117443" cy="110788"/>
-          </a:xfrm>
-          <a:custGeom>
-            <a:avLst/>
-            <a:gdLst/>
-            <a:ahLst/>
-            <a:cxnLst/>
-            <a:rect l="l" t="t" r="r" b="b"/>
-            <a:pathLst>
-              <a:path w="117443" h="110788">
-                <a:moveTo>
-                  <a:pt x="34710" y="0"/>
-                </a:moveTo>
-                <a:lnTo>
-                  <a:pt x="117443" y="69422"/>
-                </a:lnTo>
-                <a:lnTo>
-                  <a:pt x="82733" y="110788"/>
-                </a:lnTo>
-                <a:lnTo>
-                  <a:pt x="0" y="41367"/>
-                </a:lnTo>
-                <a:close/>
-              </a:path>
-            </a:pathLst>
-          </a:custGeom>
-          <a:solidFill>
-            <a:srgbClr val="8C8C8C"/>
-          </a:solidFill>
-          <a:ln>
-            <a:noFill/>
-          </a:ln>
-        </p:spPr>
-        <p:txBody>
-          <a:bodyPr rtlCol="0" anchor="ctr"/>
-          <a:lstStyle/>
-          <a:p>
-            <a:pPr algn="ctr"/>
-          </a:p>
-        </p:txBody>
-      </p:sp>
-      <p:sp>
-        <p:nvSpPr>
-          <p:cNvPr id="6" name="텍스트"/>
-          <p:cNvSpPr txBox="1"/>
-          <p:nvPr/>
-        </p:nvSpPr>
-        <p:spPr>
-          <a:xfrm>
-            <a:off x="1440000" y="432000"/>
-            <a:ext cx="1584000" cy="792000"/>
+            <a:off x="252000" y="324000"/>
+            <a:ext cx="2520000" cy="792000"/>
           </a:xfrm>
           <a:prstGeom prst="rect">
             <a:avLst/>
@@ -3790,62 +3629,45 @@
           <a:noFill/>
         </p:spPr>
         <p:txBody>
-          <a:bodyPr wrap="square" lIns="0" rIns="0" tIns="0" bIns="0" anchor="ctr">
+          <a:bodyPr wrap="square" lIns="0" rIns="0" tIns="0" bIns="0" anchor="t">
             <a:spAutoFit/>
           </a:bodyPr>
           <a:lstStyle/>
           <a:p>
             <a:pPr algn="l">
               <a:lnSpc>
-                <a:spcPts val="1667"/>
+                <a:spcPts val="1884"/>
               </a:lnSpc>
             </a:pPr>
             <a:r>
-              <a:rPr sz="1150" b="1">
+              <a:rPr sz="1300" b="1">
                 <a:solidFill>
-                  <a:srgbClr val="6E570C"/>
+                  <a:srgbClr val="12151C"/>
                 </a:solidFill>
-                <a:latin typeface="바탕"/>
-                <a:ea typeface="바탕"/>
+                <a:latin typeface="맑은 고딕"/>
+                <a:ea typeface="맑은 고딕"/>
               </a:rPr>
-              <a:t>오늘도 한 장의</a:t>
-            </a:r>
-          </a:p>
-          <a:p>
-            <a:pPr algn="l">
-              <a:lnSpc>
-                <a:spcPts val="1667"/>
-              </a:lnSpc>
-            </a:pPr>
-            <a:r>
-              <a:rPr sz="1150" b="1">
-                <a:solidFill>
-                  <a:srgbClr val="6E570C"/>
-                </a:solidFill>
-                <a:latin typeface="바탕"/>
-                <a:ea typeface="바탕"/>
-              </a:rPr>
-              <a:t>영감을 줍습니다</a:t>
-            </a:r>
-          </a:p>
-        </p:txBody>
-      </p:sp>
-      <p:sp>
-        <p:nvSpPr>
-          <p:cNvPr id="7" name="Rectangle 6"/>
+              <a:t>오늘도 한 장의 영감을 줍습니다</a:t>
+            </a:r>
+          </a:p>
+        </p:txBody>
+      </p:sp>
+      <p:sp>
+        <p:nvSpPr>
+          <p:cNvPr id="3" name="Rectangle 2"/>
           <p:cNvSpPr/>
           <p:nvPr/>
         </p:nvSpPr>
         <p:spPr>
           <a:xfrm>
-            <a:off x="1440000" y="1317600"/>
-            <a:ext cx="180000" cy="10800"/>
+            <a:off x="0" y="1476000"/>
+            <a:ext cx="3240000" cy="324000"/>
           </a:xfrm>
           <a:prstGeom prst="rect">
             <a:avLst/>
           </a:prstGeom>
           <a:solidFill>
-            <a:srgbClr val="CAA016"/>
+            <a:srgbClr val="FF6A13"/>
           </a:solidFill>
           <a:ln>
             <a:noFill/>
@@ -3861,14 +3683,14 @@
       </p:sp>
       <p:sp>
         <p:nvSpPr>
-          <p:cNvPr id="8" name="텍스트"/>
+          <p:cNvPr id="4" name="텍스트"/>
           <p:cNvSpPr txBox="1"/>
           <p:nvPr/>
         </p:nvSpPr>
         <p:spPr>
           <a:xfrm>
-            <a:off x="1440000" y="1418400"/>
-            <a:ext cx="1584000" cy="108000"/>
+            <a:off x="252000" y="1569600"/>
+            <a:ext cx="1872000" cy="142876"/>
           </a:xfrm>
           <a:prstGeom prst="rect">
             <a:avLst/>
@@ -3889,13 +3711,104 @@
             <a:r>
               <a:rPr sz="750" b="1" spc="200">
                 <a:solidFill>
-                  <a:srgbClr val="786C44"/>
+                  <a:srgbClr val="12151C"/>
                 </a:solidFill>
                 <a:latin typeface="맑은 고딕"/>
                 <a:ea typeface="맑은 고딕"/>
               </a:rPr>
               <a:t>스튜디오 이름</a:t>
             </a:r>
+          </a:p>
+        </p:txBody>
+      </p:sp>
+      <p:sp>
+        <p:nvSpPr>
+          <p:cNvPr id="5" name="Oval 4"/>
+          <p:cNvSpPr/>
+          <p:nvPr/>
+        </p:nvSpPr>
+        <p:spPr>
+          <a:xfrm>
+            <a:off x="2714400" y="1616400"/>
+            <a:ext cx="43200" cy="43200"/>
+          </a:xfrm>
+          <a:prstGeom prst="ellipse">
+            <a:avLst/>
+          </a:prstGeom>
+          <a:solidFill>
+            <a:srgbClr val="12151C"/>
+          </a:solidFill>
+          <a:ln>
+            <a:noFill/>
+          </a:ln>
+        </p:spPr>
+        <p:txBody>
+          <a:bodyPr rtlCol="0" anchor="ctr"/>
+          <a:lstStyle/>
+          <a:p>
+            <a:pPr algn="ctr"/>
+          </a:p>
+        </p:txBody>
+      </p:sp>
+      <p:sp>
+        <p:nvSpPr>
+          <p:cNvPr id="6" name="Oval 5"/>
+          <p:cNvSpPr/>
+          <p:nvPr/>
+        </p:nvSpPr>
+        <p:spPr>
+          <a:xfrm>
+            <a:off x="2822400" y="1616400"/>
+            <a:ext cx="43200" cy="43200"/>
+          </a:xfrm>
+          <a:prstGeom prst="ellipse">
+            <a:avLst/>
+          </a:prstGeom>
+          <a:solidFill>
+            <a:srgbClr val="12151C">
+              <a:alpha val="50000"/>
+            </a:srgbClr>
+          </a:solidFill>
+          <a:ln>
+            <a:noFill/>
+          </a:ln>
+        </p:spPr>
+        <p:txBody>
+          <a:bodyPr rtlCol="0" anchor="ctr"/>
+          <a:lstStyle/>
+          <a:p>
+            <a:pPr algn="ctr"/>
+          </a:p>
+        </p:txBody>
+      </p:sp>
+      <p:sp>
+        <p:nvSpPr>
+          <p:cNvPr id="7" name="Oval 6"/>
+          <p:cNvSpPr/>
+          <p:nvPr/>
+        </p:nvSpPr>
+        <p:spPr>
+          <a:xfrm>
+            <a:off x="2930400" y="1616400"/>
+            <a:ext cx="43200" cy="43200"/>
+          </a:xfrm>
+          <a:prstGeom prst="ellipse">
+            <a:avLst/>
+          </a:prstGeom>
+          <a:solidFill>
+            <a:srgbClr val="12151C">
+              <a:alpha val="50000"/>
+            </a:srgbClr>
+          </a:solidFill>
+          <a:ln>
+            <a:noFill/>
+          </a:ln>
+        </p:spPr>
+        <p:txBody>
+          <a:bodyPr rtlCol="0" anchor="ctr"/>
+          <a:lstStyle/>
+          <a:p>
+            <a:pPr algn="ctr"/>
           </a:p>
         </p:txBody>
       </p:sp>

--- a/public/fun/cards/creative/creative-47.pptx
+++ b/public/fun/cards/creative/creative-47.pptx
@@ -3105,8 +3105,8 @@
         </p:nvSpPr>
         <p:spPr>
           <a:xfrm>
-            <a:off x="2016000" y="0"/>
-            <a:ext cx="1224000" cy="1800000"/>
+            <a:off x="2124000" y="0"/>
+            <a:ext cx="1116000" cy="1800000"/>
           </a:xfrm>
           <a:custGeom>
             <a:avLst/>
@@ -3115,15 +3115,15 @@
             <a:cxnLst/>
             <a:rect l="l" t="t" r="r" b="b"/>
             <a:pathLst>
-              <a:path w="1224000" h="1800000">
+              <a:path w="1116000" h="1800000">
                 <a:moveTo>
                   <a:pt x="360000" y="0"/>
                 </a:moveTo>
                 <a:lnTo>
-                  <a:pt x="1224000" y="0"/>
+                  <a:pt x="1116000" y="0"/>
                 </a:lnTo>
                 <a:lnTo>
-                  <a:pt x="1224000" y="1800000"/>
+                  <a:pt x="1116000" y="1800000"/>
                 </a:lnTo>
                 <a:lnTo>
                   <a:pt x="0" y="1800000"/>
@@ -3147,66 +3147,79 @@
           </a:p>
         </p:txBody>
       </p:sp>
-      <p:sp>
-        <p:nvSpPr>
-          <p:cNvPr id="3" name="Freeform 2"/>
-          <p:cNvSpPr/>
+      <p:cxnSp>
+        <p:nvCxnSpPr>
+          <p:cNvPr id="3" name="Connector 2"/>
+          <p:cNvCxnSpPr/>
           <p:nvPr/>
-        </p:nvSpPr>
-        <p:spPr>
-          <a:xfrm>
-            <a:off x="1864800" y="0"/>
-            <a:ext cx="460800" cy="1800000"/>
-          </a:xfrm>
-          <a:custGeom>
+        </p:nvCxnSpPr>
+        <p:spPr>
+          <a:xfrm flipH="1">
+            <a:off x="2044800" y="0"/>
+            <a:ext cx="360000" cy="1800000"/>
+          </a:xfrm>
+          <a:prstGeom prst="line">
             <a:avLst/>
-            <a:gdLst/>
-            <a:ahLst/>
-            <a:cxnLst/>
-            <a:rect l="l" t="t" r="r" b="b"/>
-            <a:pathLst>
-              <a:path w="460800" h="1800000">
-                <a:moveTo>
-                  <a:pt x="360000" y="0"/>
-                </a:moveTo>
-                <a:lnTo>
-                  <a:pt x="460800" y="0"/>
-                </a:lnTo>
-                <a:lnTo>
-                  <a:pt x="100800" y="1800000"/>
-                </a:lnTo>
-                <a:lnTo>
-                  <a:pt x="0" y="1800000"/>
-                </a:lnTo>
-                <a:close/>
-              </a:path>
-            </a:pathLst>
-          </a:custGeom>
-          <a:solidFill>
-            <a:srgbClr val="FF8842"/>
-          </a:solidFill>
-          <a:ln>
-            <a:noFill/>
+          </a:prstGeom>
+          <a:ln w="3600">
+            <a:solidFill>
+              <a:srgbClr val="46281A"/>
+            </a:solidFill>
           </a:ln>
         </p:spPr>
-        <p:txBody>
-          <a:bodyPr rtlCol="0" anchor="ctr"/>
-          <a:lstStyle/>
-          <a:p>
-            <a:pPr algn="ctr"/>
-          </a:p>
-        </p:txBody>
-      </p:sp>
-      <p:sp>
-        <p:nvSpPr>
-          <p:cNvPr id="4" name="텍스트"/>
+      </p:cxnSp>
+      <p:cxnSp>
+        <p:nvCxnSpPr>
+          <p:cNvPr id="4" name="Connector 3"/>
+          <p:cNvCxnSpPr/>
+          <p:nvPr/>
+        </p:nvCxnSpPr>
+        <p:spPr>
+          <a:xfrm flipH="1">
+            <a:off x="1965600" y="0"/>
+            <a:ext cx="360000" cy="1800000"/>
+          </a:xfrm>
+          <a:prstGeom prst="line">
+            <a:avLst/>
+          </a:prstGeom>
+          <a:ln w="3600">
+            <a:solidFill>
+              <a:srgbClr val="46281A"/>
+            </a:solidFill>
+          </a:ln>
+        </p:spPr>
+      </p:cxnSp>
+      <p:cxnSp>
+        <p:nvCxnSpPr>
+          <p:cNvPr id="5" name="Connector 4"/>
+          <p:cNvCxnSpPr/>
+          <p:nvPr/>
+        </p:nvCxnSpPr>
+        <p:spPr>
+          <a:xfrm flipH="1">
+            <a:off x="1886400" y="0"/>
+            <a:ext cx="360000" cy="1800000"/>
+          </a:xfrm>
+          <a:prstGeom prst="line">
+            <a:avLst/>
+          </a:prstGeom>
+          <a:ln w="3600">
+            <a:solidFill>
+              <a:srgbClr val="46281A"/>
+            </a:solidFill>
+          </a:ln>
+        </p:spPr>
+      </p:cxnSp>
+      <p:sp>
+        <p:nvSpPr>
+          <p:cNvPr id="6" name="텍스트"/>
           <p:cNvSpPr txBox="1"/>
           <p:nvPr/>
         </p:nvSpPr>
         <p:spPr>
           <a:xfrm>
-            <a:off x="252000" y="223200"/>
-            <a:ext cx="1440000" cy="133351"/>
+            <a:off x="252000" y="252000"/>
+            <a:ext cx="1440000" cy="123826"/>
           </a:xfrm>
           <a:prstGeom prst="rect">
             <a:avLst/>
@@ -3221,11 +3234,11 @@
           <a:p>
             <a:pPr algn="l">
               <a:lnSpc>
-                <a:spcPts val="1015"/>
+                <a:spcPts val="942"/>
               </a:lnSpc>
             </a:pPr>
             <a:r>
-              <a:rPr sz="700" b="1" spc="200">
+              <a:rPr sz="650" b="1" spc="220">
                 <a:solidFill>
                   <a:srgbClr val="46281A"/>
                 </a:solidFill>
@@ -3237,16 +3250,37 @@
           </a:p>
         </p:txBody>
       </p:sp>
-      <p:sp>
-        <p:nvSpPr>
-          <p:cNvPr id="5" name="텍스트"/>
+      <p:cxnSp>
+        <p:nvCxnSpPr>
+          <p:cNvPr id="7" name="Connector 6"/>
+          <p:cNvCxnSpPr/>
+          <p:nvPr/>
+        </p:nvCxnSpPr>
+        <p:spPr>
+          <a:xfrm>
+            <a:off x="252000" y="374400"/>
+            <a:ext cx="1260000" cy="0"/>
+          </a:xfrm>
+          <a:prstGeom prst="line">
+            <a:avLst/>
+          </a:prstGeom>
+          <a:ln w="3600">
+            <a:solidFill>
+              <a:srgbClr val="A04817"/>
+            </a:solidFill>
+          </a:ln>
+        </p:spPr>
+      </p:cxnSp>
+      <p:sp>
+        <p:nvSpPr>
+          <p:cNvPr id="8" name="텍스트"/>
           <p:cNvSpPr txBox="1"/>
           <p:nvPr/>
         </p:nvSpPr>
         <p:spPr>
           <a:xfrm>
-            <a:off x="252000" y="540000"/>
-            <a:ext cx="1584000" cy="360000"/>
+            <a:off x="252000" y="633600"/>
+            <a:ext cx="1800000" cy="237600"/>
           </a:xfrm>
           <a:prstGeom prst="rect">
             <a:avLst/>
@@ -3261,11 +3295,11 @@
           <a:p>
             <a:pPr algn="l">
               <a:lnSpc>
-                <a:spcPts val="3190"/>
+                <a:spcPts val="1957"/>
               </a:lnSpc>
             </a:pPr>
             <a:r>
-              <a:rPr sz="2200" b="1">
+              <a:rPr sz="1350" b="1" spc="120">
                 <a:solidFill>
                   <a:srgbClr val="12151C"/>
                 </a:solidFill>
@@ -3279,14 +3313,14 @@
       </p:sp>
       <p:sp>
         <p:nvSpPr>
-          <p:cNvPr id="6" name="텍스트"/>
+          <p:cNvPr id="9" name="텍스트"/>
           <p:cNvSpPr txBox="1"/>
           <p:nvPr/>
         </p:nvSpPr>
         <p:spPr>
           <a:xfrm>
-            <a:off x="252000" y="943200"/>
-            <a:ext cx="1584000" cy="171451"/>
+            <a:off x="252000" y="885600"/>
+            <a:ext cx="1800000" cy="133351"/>
           </a:xfrm>
           <a:prstGeom prst="rect">
             <a:avLst/>
@@ -3301,11 +3335,11 @@
           <a:p>
             <a:pPr algn="l">
               <a:lnSpc>
-                <a:spcPts val="1305"/>
+                <a:spcPts val="1015"/>
               </a:lnSpc>
             </a:pPr>
             <a:r>
-              <a:rPr sz="900" b="0">
+              <a:rPr sz="700" b="0" spc="60">
                 <a:solidFill>
                   <a:srgbClr val="46281A"/>
                 </a:solidFill>
@@ -3319,14 +3353,14 @@
       </p:sp>
       <p:sp>
         <p:nvSpPr>
-          <p:cNvPr id="7" name="Rectangle 6"/>
+          <p:cNvPr id="10" name="Rectangle 9"/>
           <p:cNvSpPr/>
           <p:nvPr/>
         </p:nvSpPr>
         <p:spPr>
           <a:xfrm>
-            <a:off x="252000" y="1195200"/>
-            <a:ext cx="144000" cy="18000"/>
+            <a:off x="252000" y="1044000"/>
+            <a:ext cx="129600" cy="14400"/>
           </a:xfrm>
           <a:prstGeom prst="rect">
             <a:avLst/>
@@ -3348,14 +3382,14 @@
       </p:sp>
       <p:sp>
         <p:nvSpPr>
-          <p:cNvPr id="8" name="텍스트"/>
+          <p:cNvPr id="11" name="텍스트"/>
           <p:cNvSpPr txBox="1"/>
           <p:nvPr/>
         </p:nvSpPr>
         <p:spPr>
           <a:xfrm>
-            <a:off x="252000" y="1328400"/>
-            <a:ext cx="331200" cy="99061"/>
+            <a:off x="252000" y="1184400"/>
+            <a:ext cx="324000" cy="91441"/>
           </a:xfrm>
           <a:prstGeom prst="rect">
             <a:avLst/>
@@ -3370,11 +3404,11 @@
           <a:p>
             <a:pPr algn="l">
               <a:lnSpc>
-                <a:spcPts val="754"/>
+                <a:spcPts val="696"/>
               </a:lnSpc>
             </a:pPr>
             <a:r>
-              <a:rPr sz="520" b="1" spc="120">
+              <a:rPr sz="480" b="1" spc="140">
                 <a:solidFill>
                   <a:srgbClr val="46281A"/>
                 </a:solidFill>
@@ -3388,14 +3422,14 @@
       </p:sp>
       <p:sp>
         <p:nvSpPr>
-          <p:cNvPr id="9" name="텍스트"/>
+          <p:cNvPr id="12" name="텍스트"/>
           <p:cNvSpPr txBox="1"/>
           <p:nvPr/>
         </p:nvSpPr>
         <p:spPr>
           <a:xfrm>
-            <a:off x="583200" y="1317600"/>
-            <a:ext cx="1188000" cy="125731"/>
+            <a:off x="576000" y="1173600"/>
+            <a:ext cx="972000" cy="120016"/>
           </a:xfrm>
           <a:prstGeom prst="rect">
             <a:avLst/>
@@ -3410,11 +3444,11 @@
           <a:p>
             <a:pPr algn="l">
               <a:lnSpc>
-                <a:spcPts val="956"/>
+                <a:spcPts val="913"/>
               </a:lnSpc>
             </a:pPr>
             <a:r>
-              <a:rPr sz="660" b="0">
+              <a:rPr sz="630" b="0">
                 <a:solidFill>
                   <a:srgbClr val="12151C"/>
                 </a:solidFill>
@@ -3428,14 +3462,14 @@
       </p:sp>
       <p:sp>
         <p:nvSpPr>
-          <p:cNvPr id="10" name="텍스트"/>
+          <p:cNvPr id="13" name="텍스트"/>
           <p:cNvSpPr txBox="1"/>
           <p:nvPr/>
         </p:nvSpPr>
         <p:spPr>
           <a:xfrm>
-            <a:off x="252000" y="1458000"/>
-            <a:ext cx="331200" cy="99061"/>
+            <a:off x="252000" y="1314000"/>
+            <a:ext cx="324000" cy="91441"/>
           </a:xfrm>
           <a:prstGeom prst="rect">
             <a:avLst/>
@@ -3450,11 +3484,11 @@
           <a:p>
             <a:pPr algn="l">
               <a:lnSpc>
-                <a:spcPts val="754"/>
+                <a:spcPts val="696"/>
               </a:lnSpc>
             </a:pPr>
             <a:r>
-              <a:rPr sz="520" b="1" spc="120">
+              <a:rPr sz="480" b="1" spc="140">
                 <a:solidFill>
                   <a:srgbClr val="46281A"/>
                 </a:solidFill>
@@ -3468,14 +3502,14 @@
       </p:sp>
       <p:sp>
         <p:nvSpPr>
-          <p:cNvPr id="11" name="텍스트"/>
+          <p:cNvPr id="14" name="텍스트"/>
           <p:cNvSpPr txBox="1"/>
           <p:nvPr/>
         </p:nvSpPr>
         <p:spPr>
           <a:xfrm>
-            <a:off x="583200" y="1447200"/>
-            <a:ext cx="1188000" cy="125731"/>
+            <a:off x="576000" y="1303200"/>
+            <a:ext cx="972000" cy="120016"/>
           </a:xfrm>
           <a:prstGeom prst="rect">
             <a:avLst/>
@@ -3490,11 +3524,11 @@
           <a:p>
             <a:pPr algn="l">
               <a:lnSpc>
-                <a:spcPts val="956"/>
+                <a:spcPts val="913"/>
               </a:lnSpc>
             </a:pPr>
             <a:r>
-              <a:rPr sz="660" b="0">
+              <a:rPr sz="630" b="0">
                 <a:solidFill>
                   <a:srgbClr val="12151C"/>
                 </a:solidFill>
@@ -3508,14 +3542,14 @@
       </p:sp>
       <p:sp>
         <p:nvSpPr>
-          <p:cNvPr id="12" name="텍스트"/>
+          <p:cNvPr id="15" name="텍스트"/>
           <p:cNvSpPr txBox="1"/>
           <p:nvPr/>
         </p:nvSpPr>
         <p:spPr>
           <a:xfrm>
-            <a:off x="252000" y="1587600"/>
-            <a:ext cx="331200" cy="99061"/>
+            <a:off x="252000" y="1443600"/>
+            <a:ext cx="324000" cy="91441"/>
           </a:xfrm>
           <a:prstGeom prst="rect">
             <a:avLst/>
@@ -3530,11 +3564,11 @@
           <a:p>
             <a:pPr algn="l">
               <a:lnSpc>
-                <a:spcPts val="754"/>
+                <a:spcPts val="696"/>
               </a:lnSpc>
             </a:pPr>
             <a:r>
-              <a:rPr sz="520" b="1" spc="120">
+              <a:rPr sz="480" b="1" spc="140">
                 <a:solidFill>
                   <a:srgbClr val="46281A"/>
                 </a:solidFill>
@@ -3548,14 +3582,14 @@
       </p:sp>
       <p:sp>
         <p:nvSpPr>
-          <p:cNvPr id="13" name="텍스트"/>
+          <p:cNvPr id="16" name="텍스트"/>
           <p:cNvSpPr txBox="1"/>
           <p:nvPr/>
         </p:nvSpPr>
         <p:spPr>
           <a:xfrm>
-            <a:off x="583200" y="1576800"/>
-            <a:ext cx="1188000" cy="125731"/>
+            <a:off x="576000" y="1432800"/>
+            <a:ext cx="972000" cy="120016"/>
           </a:xfrm>
           <a:prstGeom prst="rect">
             <a:avLst/>
@@ -3570,11 +3604,11 @@
           <a:p>
             <a:pPr algn="l">
               <a:lnSpc>
-                <a:spcPts val="956"/>
+                <a:spcPts val="913"/>
               </a:lnSpc>
             </a:pPr>
             <a:r>
-              <a:rPr sz="660" b="0">
+              <a:rPr sz="630" b="0">
                 <a:solidFill>
                   <a:srgbClr val="12151C"/>
                 </a:solidFill>
@@ -3620,8 +3654,8 @@
         </p:nvSpPr>
         <p:spPr>
           <a:xfrm>
-            <a:off x="252000" y="324000"/>
-            <a:ext cx="2520000" cy="792000"/>
+            <a:off x="252000" y="252000"/>
+            <a:ext cx="1080000" cy="99061"/>
           </a:xfrm>
           <a:prstGeom prst="rect">
             <a:avLst/>
@@ -3636,18 +3670,18 @@
           <a:p>
             <a:pPr algn="l">
               <a:lnSpc>
-                <a:spcPts val="1884"/>
+                <a:spcPts val="754"/>
               </a:lnSpc>
             </a:pPr>
             <a:r>
-              <a:rPr sz="1300" b="1">
+              <a:rPr sz="520" b="1" spc="240">
                 <a:solidFill>
-                  <a:srgbClr val="12151C"/>
+                  <a:srgbClr val="6B7280"/>
                 </a:solidFill>
                 <a:latin typeface="맑은 고딕"/>
                 <a:ea typeface="맑은 고딕"/>
               </a:rPr>
-              <a:t>오늘도 한 장의 영감을 줍습니다</a:t>
+              <a:t>작업 분야</a:t>
             </a:r>
           </a:p>
         </p:txBody>
@@ -3660,8 +3694,8 @@
         </p:nvSpPr>
         <p:spPr>
           <a:xfrm>
-            <a:off x="0" y="1476000"/>
-            <a:ext cx="3240000" cy="324000"/>
+            <a:off x="252000" y="352800"/>
+            <a:ext cx="108000" cy="14400"/>
           </a:xfrm>
           <a:prstGeom prst="rect">
             <a:avLst/>
@@ -3681,16 +3715,37 @@
           </a:p>
         </p:txBody>
       </p:sp>
-      <p:sp>
-        <p:nvSpPr>
-          <p:cNvPr id="4" name="텍스트"/>
+      <p:cxnSp>
+        <p:nvCxnSpPr>
+          <p:cNvPr id="4" name="Connector 3"/>
+          <p:cNvCxnSpPr/>
+          <p:nvPr/>
+        </p:nvCxnSpPr>
+        <p:spPr>
+          <a:xfrm>
+            <a:off x="252000" y="468000"/>
+            <a:ext cx="1512000" cy="0"/>
+          </a:xfrm>
+          <a:prstGeom prst="line">
+            <a:avLst/>
+          </a:prstGeom>
+          <a:ln w="3600">
+            <a:solidFill>
+              <a:srgbClr val="DCDFE4"/>
+            </a:solidFill>
+          </a:ln>
+        </p:spPr>
+      </p:cxnSp>
+      <p:sp>
+        <p:nvSpPr>
+          <p:cNvPr id="5" name="텍스트"/>
           <p:cNvSpPr txBox="1"/>
           <p:nvPr/>
         </p:nvSpPr>
         <p:spPr>
           <a:xfrm>
-            <a:off x="252000" y="1569600"/>
-            <a:ext cx="1872000" cy="142876"/>
+            <a:off x="252000" y="511200"/>
+            <a:ext cx="1260000" cy="133351"/>
           </a:xfrm>
           <a:prstGeom prst="rect">
             <a:avLst/>
@@ -3705,41 +3760,246 @@
           <a:p>
             <a:pPr algn="l">
               <a:lnSpc>
-                <a:spcPts val="1087"/>
+                <a:spcPts val="1015"/>
               </a:lnSpc>
             </a:pPr>
             <a:r>
-              <a:rPr sz="750" b="1" spc="200">
+              <a:rPr sz="700" b="0">
                 <a:solidFill>
                   <a:srgbClr val="12151C"/>
                 </a:solidFill>
                 <a:latin typeface="맑은 고딕"/>
                 <a:ea typeface="맑은 고딕"/>
               </a:rPr>
-              <a:t>스튜디오 이름</a:t>
-            </a:r>
-          </a:p>
-        </p:txBody>
-      </p:sp>
-      <p:sp>
-        <p:nvSpPr>
-          <p:cNvPr id="5" name="Oval 4"/>
+              <a:t>브랜딩</a:t>
+            </a:r>
+          </a:p>
+        </p:txBody>
+      </p:sp>
+      <p:cxnSp>
+        <p:nvCxnSpPr>
+          <p:cNvPr id="6" name="Connector 5"/>
+          <p:cNvCxnSpPr/>
+          <p:nvPr/>
+        </p:nvCxnSpPr>
+        <p:spPr>
+          <a:xfrm>
+            <a:off x="252000" y="655200"/>
+            <a:ext cx="1512000" cy="0"/>
+          </a:xfrm>
+          <a:prstGeom prst="line">
+            <a:avLst/>
+          </a:prstGeom>
+          <a:ln w="3600">
+            <a:solidFill>
+              <a:srgbClr val="DCDFE4"/>
+            </a:solidFill>
+          </a:ln>
+        </p:spPr>
+      </p:cxnSp>
+      <p:sp>
+        <p:nvSpPr>
+          <p:cNvPr id="7" name="텍스트"/>
+          <p:cNvSpPr txBox="1"/>
+          <p:nvPr/>
+        </p:nvSpPr>
+        <p:spPr>
+          <a:xfrm>
+            <a:off x="252000" y="698400"/>
+            <a:ext cx="1260000" cy="133351"/>
+          </a:xfrm>
+          <a:prstGeom prst="rect">
+            <a:avLst/>
+          </a:prstGeom>
+          <a:noFill/>
+        </p:spPr>
+        <p:txBody>
+          <a:bodyPr wrap="square" lIns="0" rIns="0" tIns="0" bIns="0" anchor="t">
+            <a:spAutoFit/>
+          </a:bodyPr>
+          <a:lstStyle/>
+          <a:p>
+            <a:pPr algn="l">
+              <a:lnSpc>
+                <a:spcPts val="1015"/>
+              </a:lnSpc>
+            </a:pPr>
+            <a:r>
+              <a:rPr sz="700" b="0">
+                <a:solidFill>
+                  <a:srgbClr val="12151C"/>
+                </a:solidFill>
+                <a:latin typeface="맑은 고딕"/>
+                <a:ea typeface="맑은 고딕"/>
+              </a:rPr>
+              <a:t>로고 디자인</a:t>
+            </a:r>
+          </a:p>
+        </p:txBody>
+      </p:sp>
+      <p:cxnSp>
+        <p:nvCxnSpPr>
+          <p:cNvPr id="8" name="Connector 7"/>
+          <p:cNvCxnSpPr/>
+          <p:nvPr/>
+        </p:nvCxnSpPr>
+        <p:spPr>
+          <a:xfrm>
+            <a:off x="252000" y="842400"/>
+            <a:ext cx="1512000" cy="0"/>
+          </a:xfrm>
+          <a:prstGeom prst="line">
+            <a:avLst/>
+          </a:prstGeom>
+          <a:ln w="3600">
+            <a:solidFill>
+              <a:srgbClr val="DCDFE4"/>
+            </a:solidFill>
+          </a:ln>
+        </p:spPr>
+      </p:cxnSp>
+      <p:sp>
+        <p:nvSpPr>
+          <p:cNvPr id="9" name="텍스트"/>
+          <p:cNvSpPr txBox="1"/>
+          <p:nvPr/>
+        </p:nvSpPr>
+        <p:spPr>
+          <a:xfrm>
+            <a:off x="252000" y="885600"/>
+            <a:ext cx="1260000" cy="133351"/>
+          </a:xfrm>
+          <a:prstGeom prst="rect">
+            <a:avLst/>
+          </a:prstGeom>
+          <a:noFill/>
+        </p:spPr>
+        <p:txBody>
+          <a:bodyPr wrap="square" lIns="0" rIns="0" tIns="0" bIns="0" anchor="t">
+            <a:spAutoFit/>
+          </a:bodyPr>
+          <a:lstStyle/>
+          <a:p>
+            <a:pPr algn="l">
+              <a:lnSpc>
+                <a:spcPts val="1015"/>
+              </a:lnSpc>
+            </a:pPr>
+            <a:r>
+              <a:rPr sz="700" b="0">
+                <a:solidFill>
+                  <a:srgbClr val="12151C"/>
+                </a:solidFill>
+                <a:latin typeface="맑은 고딕"/>
+                <a:ea typeface="맑은 고딕"/>
+              </a:rPr>
+              <a:t>제품 촬영</a:t>
+            </a:r>
+          </a:p>
+        </p:txBody>
+      </p:sp>
+      <p:cxnSp>
+        <p:nvCxnSpPr>
+          <p:cNvPr id="10" name="Connector 9"/>
+          <p:cNvCxnSpPr/>
+          <p:nvPr/>
+        </p:nvCxnSpPr>
+        <p:spPr>
+          <a:xfrm>
+            <a:off x="252000" y="1029600"/>
+            <a:ext cx="1512000" cy="0"/>
+          </a:xfrm>
+          <a:prstGeom prst="line">
+            <a:avLst/>
+          </a:prstGeom>
+          <a:ln w="3600">
+            <a:solidFill>
+              <a:srgbClr val="DCDFE4"/>
+            </a:solidFill>
+          </a:ln>
+        </p:spPr>
+      </p:cxnSp>
+      <p:sp>
+        <p:nvSpPr>
+          <p:cNvPr id="11" name="텍스트"/>
+          <p:cNvSpPr txBox="1"/>
+          <p:nvPr/>
+        </p:nvSpPr>
+        <p:spPr>
+          <a:xfrm>
+            <a:off x="252000" y="1072800"/>
+            <a:ext cx="1260000" cy="133351"/>
+          </a:xfrm>
+          <a:prstGeom prst="rect">
+            <a:avLst/>
+          </a:prstGeom>
+          <a:noFill/>
+        </p:spPr>
+        <p:txBody>
+          <a:bodyPr wrap="square" lIns="0" rIns="0" tIns="0" bIns="0" anchor="t">
+            <a:spAutoFit/>
+          </a:bodyPr>
+          <a:lstStyle/>
+          <a:p>
+            <a:pPr algn="l">
+              <a:lnSpc>
+                <a:spcPts val="1015"/>
+              </a:lnSpc>
+            </a:pPr>
+            <a:r>
+              <a:rPr sz="700" b="0">
+                <a:solidFill>
+                  <a:srgbClr val="12151C"/>
+                </a:solidFill>
+                <a:latin typeface="맑은 고딕"/>
+                <a:ea typeface="맑은 고딕"/>
+              </a:rPr>
+              <a:t>캘리그라피</a:t>
+            </a:r>
+          </a:p>
+        </p:txBody>
+      </p:sp>
+      <p:cxnSp>
+        <p:nvCxnSpPr>
+          <p:cNvPr id="12" name="Connector 11"/>
+          <p:cNvCxnSpPr/>
+          <p:nvPr/>
+        </p:nvCxnSpPr>
+        <p:spPr>
+          <a:xfrm>
+            <a:off x="252000" y="1216800"/>
+            <a:ext cx="1512000" cy="0"/>
+          </a:xfrm>
+          <a:prstGeom prst="line">
+            <a:avLst/>
+          </a:prstGeom>
+          <a:ln w="3600">
+            <a:solidFill>
+              <a:srgbClr val="DCDFE4"/>
+            </a:solidFill>
+          </a:ln>
+        </p:spPr>
+      </p:cxnSp>
+      <p:sp>
+        <p:nvSpPr>
+          <p:cNvPr id="13" name="Rectangle 12"/>
           <p:cNvSpPr/>
           <p:nvPr/>
         </p:nvSpPr>
         <p:spPr>
           <a:xfrm>
-            <a:off x="2714400" y="1616400"/>
-            <a:ext cx="43200" cy="43200"/>
-          </a:xfrm>
-          <a:prstGeom prst="ellipse">
+            <a:off x="2196000" y="396000"/>
+            <a:ext cx="720000" cy="720000"/>
+          </a:xfrm>
+          <a:prstGeom prst="rect">
             <a:avLst/>
           </a:prstGeom>
-          <a:solidFill>
-            <a:srgbClr val="12151C"/>
-          </a:solidFill>
-          <a:ln>
-            <a:noFill/>
+          <a:noFill/>
+          <a:ln w="4320">
+            <a:solidFill>
+              <a:srgbClr val="6B7280"/>
+            </a:solidFill>
+            <a:prstDash val="dash"/>
           </a:ln>
         </p:spPr>
         <p:txBody>
@@ -3752,63 +4012,121 @@
       </p:sp>
       <p:sp>
         <p:nvSpPr>
-          <p:cNvPr id="6" name="Oval 5"/>
-          <p:cNvSpPr/>
+          <p:cNvPr id="14" name="텍스트"/>
+          <p:cNvSpPr txBox="1"/>
           <p:nvPr/>
         </p:nvSpPr>
         <p:spPr>
           <a:xfrm>
-            <a:off x="2822400" y="1616400"/>
-            <a:ext cx="43200" cy="43200"/>
-          </a:xfrm>
-          <a:prstGeom prst="ellipse">
+            <a:off x="2196000" y="396000"/>
+            <a:ext cx="720000" cy="720000"/>
+          </a:xfrm>
+          <a:prstGeom prst="rect">
             <a:avLst/>
           </a:prstGeom>
-          <a:solidFill>
-            <a:srgbClr val="12151C">
-              <a:alpha val="50000"/>
-            </a:srgbClr>
-          </a:solidFill>
-          <a:ln>
-            <a:noFill/>
-          </a:ln>
-        </p:spPr>
-        <p:txBody>
-          <a:bodyPr rtlCol="0" anchor="ctr"/>
-          <a:lstStyle/>
-          <a:p>
-            <a:pPr algn="ctr"/>
-          </a:p>
-        </p:txBody>
-      </p:sp>
-      <p:sp>
-        <p:nvSpPr>
-          <p:cNvPr id="7" name="Oval 6"/>
-          <p:cNvSpPr/>
+          <a:noFill/>
+        </p:spPr>
+        <p:txBody>
+          <a:bodyPr wrap="square" lIns="0" rIns="0" tIns="0" bIns="0" anchor="ctr">
+            <a:spAutoFit/>
+          </a:bodyPr>
+          <a:lstStyle/>
+          <a:p>
+            <a:pPr algn="ctr">
+              <a:lnSpc>
+                <a:spcPts val="1305"/>
+              </a:lnSpc>
+            </a:pPr>
+            <a:r>
+              <a:rPr sz="900" b="1">
+                <a:solidFill>
+                  <a:srgbClr val="6B7280"/>
+                </a:solidFill>
+                <a:latin typeface="맑은 고딕"/>
+                <a:ea typeface="맑은 고딕"/>
+              </a:rPr>
+              <a:t>QR</a:t>
+            </a:r>
+          </a:p>
+        </p:txBody>
+      </p:sp>
+      <p:sp>
+        <p:nvSpPr>
+          <p:cNvPr id="15" name="텍스트"/>
+          <p:cNvSpPr txBox="1"/>
           <p:nvPr/>
         </p:nvSpPr>
         <p:spPr>
           <a:xfrm>
-            <a:off x="2930400" y="1616400"/>
-            <a:ext cx="43200" cy="43200"/>
-          </a:xfrm>
-          <a:prstGeom prst="ellipse">
+            <a:off x="2196000" y="1209600"/>
+            <a:ext cx="720000" cy="118111"/>
+          </a:xfrm>
+          <a:prstGeom prst="rect">
             <a:avLst/>
           </a:prstGeom>
-          <a:solidFill>
-            <a:srgbClr val="12151C">
-              <a:alpha val="50000"/>
-            </a:srgbClr>
-          </a:solidFill>
-          <a:ln>
-            <a:noFill/>
-          </a:ln>
-        </p:spPr>
-        <p:txBody>
-          <a:bodyPr rtlCol="0" anchor="ctr"/>
-          <a:lstStyle/>
-          <a:p>
-            <a:pPr algn="ctr"/>
+          <a:noFill/>
+        </p:spPr>
+        <p:txBody>
+          <a:bodyPr wrap="square" lIns="0" rIns="0" tIns="0" bIns="0" anchor="t">
+            <a:spAutoFit/>
+          </a:bodyPr>
+          <a:lstStyle/>
+          <a:p>
+            <a:pPr algn="ctr">
+              <a:lnSpc>
+                <a:spcPts val="899"/>
+              </a:lnSpc>
+            </a:pPr>
+            <a:r>
+              <a:rPr sz="620" b="0">
+                <a:solidFill>
+                  <a:srgbClr val="12151C"/>
+                </a:solidFill>
+                <a:latin typeface="맑은 고딕"/>
+                <a:ea typeface="맑은 고딕"/>
+              </a:rPr>
+              <a:t>@아이디</a:t>
+            </a:r>
+          </a:p>
+        </p:txBody>
+      </p:sp>
+      <p:sp>
+        <p:nvSpPr>
+          <p:cNvPr id="16" name="텍스트"/>
+          <p:cNvSpPr txBox="1"/>
+          <p:nvPr/>
+        </p:nvSpPr>
+        <p:spPr>
+          <a:xfrm>
+            <a:off x="2196000" y="1353600"/>
+            <a:ext cx="720000" cy="118111"/>
+          </a:xfrm>
+          <a:prstGeom prst="rect">
+            <a:avLst/>
+          </a:prstGeom>
+          <a:noFill/>
+        </p:spPr>
+        <p:txBody>
+          <a:bodyPr wrap="square" lIns="0" rIns="0" tIns="0" bIns="0" anchor="t">
+            <a:spAutoFit/>
+          </a:bodyPr>
+          <a:lstStyle/>
+          <a:p>
+            <a:pPr algn="ctr">
+              <a:lnSpc>
+                <a:spcPts val="899"/>
+              </a:lnSpc>
+            </a:pPr>
+            <a:r>
+              <a:rPr sz="620" b="0">
+                <a:solidFill>
+                  <a:srgbClr val="6B7280"/>
+                </a:solidFill>
+                <a:latin typeface="맑은 고딕"/>
+                <a:ea typeface="맑은 고딕"/>
+              </a:rPr>
+              <a:t>예약 후 방문</a:t>
+            </a:r>
           </a:p>
         </p:txBody>
       </p:sp>
